--- a/slides/03_Asking_a_Question_Data_Can_Answer.pptx
+++ b/slides/03_Asking_a_Question_Data_Can_Answer.pptx
@@ -135,7 +135,7 @@
   <p:extLst>
     <p:ext uri="{521415D9-36F7-43E2-AB2F-B90AF26B5E84}">
       <p14:sectionLst xmlns:p14="http://schemas.microsoft.com/office/powerpoint/2010/main">
-        <p14:section name="Introduction" id="{c5566edd-2e18-7c39-7272-700c7abba6a5}">
+        <p14:section name="Introduction" id="{360e2bb0-03b7-2207-6962-f55ec2d4c1e3}">
           <p14:sldIdLst>
             <p14:sldId id="256"/>
             <p14:sldId id="257"/>
@@ -144,7 +144,7 @@
             <p14:sldId id="260"/>
           </p14:sldIdLst>
         </p14:section>
-        <p14:section name="Investigable questions" id="{cafbc079-bafb-d18d-70a6-089524be0a56}">
+        <p14:section name="Investigable questions" id="{dde575ce-8e66-33c7-6e41-2dd0bf14d7d5}">
           <p14:sldIdLst>
             <p14:sldId id="261"/>
             <p14:sldId id="262"/>
@@ -153,7 +153,7 @@
             <p14:sldId id="265"/>
           </p14:sldIdLst>
         </p14:section>
-        <p14:section name="Defining our terms" id="{29d835f9-3ca3-de15-96f0-682c3737f6a2}">
+        <p14:section name="Defining our terms" id="{8c2fa524-313f-4e6b-79dc-44fffb2422cf}">
           <p14:sldIdLst>
             <p14:sldId id="266"/>
             <p14:sldId id="267"/>
@@ -162,7 +162,7 @@
             <p14:sldId id="270"/>
           </p14:sldIdLst>
         </p14:section>
-        <p14:section name="Checking our question against the data" id="{a45999c6-9889-f2b8-e354-398d9106ed30}">
+        <p14:section name="Checking our question against the data" id="{8628413f-bc6a-5d58-e025-470cbfb209ff}">
           <p14:sldIdLst>
             <p14:sldId id="271"/>
             <p14:sldId id="272"/>
@@ -175,14 +175,14 @@
             <p14:sldId id="279"/>
           </p14:sldIdLst>
         </p14:section>
-        <p14:section name="Refining our question" id="{094a45ce-eed7-3cad-2bb6-b9199fd54ad7}">
+        <p14:section name="Refining our question" id="{9325515f-c6bb-7dea-c2fc-613a087a33d6}">
           <p14:sldIdLst>
             <p14:sldId id="280"/>
             <p14:sldId id="281"/>
             <p14:sldId id="282"/>
           </p14:sldIdLst>
         </p14:section>
-        <p14:section name="Wrap up" id="{444653dd-680d-a147-a3de-9606178b54a5}">
+        <p14:section name="Wrap up" id="{6d863f85-13d5-1e52-65d2-a39ce9c6d180}">
           <p14:sldIdLst>
             <p14:sldId id="283"/>
             <p14:sldId id="284"/>
@@ -4604,7 +4604,7 @@
               <a:t> → games with </a:t>
             </a:r>
             <a:r>
-              <a:rPr lang="en-US" sz="1500" dirty="0">
+              <a:rPr lang="en-US" sz="1500" b="1" dirty="0">
                 <a:solidFill>
                   <a:srgbClr val="B86E1E"/>
                 </a:solidFill>
@@ -4623,7 +4623,7 @@
               <a:t> in their </a:t>
             </a:r>
             <a:r>
-              <a:rPr lang="en-US" sz="1500" dirty="0">
+              <a:rPr lang="en-US" sz="1500" b="1" dirty="0">
                 <a:solidFill>
                   <a:srgbClr val="B86E1E"/>
                 </a:solidFill>
@@ -5222,7 +5222,7 @@
               <a:t>If only a handful of games were Indie, any difference we found could just be luck. So we check each game's </a:t>
             </a:r>
             <a:r>
-              <a:rPr lang="en-US" sz="1300" dirty="0">
+              <a:rPr lang="en-US" sz="1300" b="1" dirty="0">
                 <a:solidFill>
                   <a:srgbClr val="B86E1E"/>
                 </a:solidFill>
@@ -5241,7 +5241,7 @@
               <a:t> for the word </a:t>
             </a:r>
             <a:r>
-              <a:rPr lang="en-US" sz="1300" dirty="0">
+              <a:rPr lang="en-US" sz="1300" b="1" dirty="0">
                 <a:solidFill>
                   <a:srgbClr val="B86E1E"/>
                 </a:solidFill>
@@ -5354,7 +5354,7 @@
               <a:t> → checks whether each </a:t>
             </a:r>
             <a:r>
-              <a:rPr lang="en-US" sz="1200" dirty="0">
+              <a:rPr lang="en-US" sz="1200" b="1" dirty="0">
                 <a:solidFill>
                   <a:srgbClr val="B86E1E"/>
                 </a:solidFill>
@@ -5373,7 +5373,7 @@
               <a:t> value contains </a:t>
             </a:r>
             <a:r>
-              <a:rPr lang="en-US" sz="1200" dirty="0">
+              <a:rPr lang="en-US" sz="1200" b="1" dirty="0">
                 <a:solidFill>
                   <a:srgbClr val="B86E1E"/>
                 </a:solidFill>
@@ -5604,7 +5604,7 @@
               <a:t>​</a:t>
             </a:r>
             <a:r>
-              <a:rPr lang="en-US" sz="1800" dirty="0">
+              <a:rPr lang="en-US" sz="1800" b="1" dirty="0">
                 <a:solidFill>
                   <a:srgbClr val="B86E1E"/>
                 </a:solidFill>
@@ -5623,7 +5623,7 @@
               <a:t> gives </a:t>
             </a:r>
             <a:r>
-              <a:rPr lang="en-US" sz="1800" dirty="0">
+              <a:rPr lang="en-US" sz="1800" b="1" dirty="0">
                 <a:solidFill>
                   <a:srgbClr val="B86E1E"/>
                 </a:solidFill>
@@ -5642,7 +5642,7 @@
               <a:t> or </a:t>
             </a:r>
             <a:r>
-              <a:rPr lang="en-US" sz="1800" dirty="0">
+              <a:rPr lang="en-US" sz="1800" b="1" dirty="0">
                 <a:solidFill>
                   <a:srgbClr val="B86E1E"/>
                 </a:solidFill>
@@ -5661,7 +5661,7 @@
               <a:t> for each value. When we </a:t>
             </a:r>
             <a:r>
-              <a:rPr lang="en-US" sz="1800" dirty="0">
+              <a:rPr lang="en-US" sz="1800" b="1" dirty="0">
                 <a:solidFill>
                   <a:srgbClr val="B86E1E"/>
                 </a:solidFill>
@@ -5680,7 +5680,7 @@
               <a:t> them, each </a:t>
             </a:r>
             <a:r>
-              <a:rPr lang="en-US" sz="1800" dirty="0">
+              <a:rPr lang="en-US" sz="1800" b="1" dirty="0">
                 <a:solidFill>
                   <a:srgbClr val="B86E1E"/>
                 </a:solidFill>
@@ -5699,7 +5699,7 @@
               <a:t> counts as 1 and each </a:t>
             </a:r>
             <a:r>
-              <a:rPr lang="en-US" sz="1800" dirty="0">
+              <a:rPr lang="en-US" sz="1800" b="1" dirty="0">
                 <a:solidFill>
                   <a:srgbClr val="B86E1E"/>
                 </a:solidFill>
@@ -6209,7 +6209,7 @@
               <a:t>What kinds of numbers do you expect </a:t>
             </a:r>
             <a:r>
-              <a:rPr lang="en-US" sz="1300" dirty="0">
+              <a:rPr lang="en-US" sz="1300" b="1" dirty="0">
                 <a:solidFill>
                   <a:srgbClr val="B86E1E"/>
                 </a:solidFill>
@@ -6423,7 +6423,7 @@
               <a:t> for every column of </a:t>
             </a:r>
             <a:r>
-              <a:rPr lang="en-US" sz="1200" dirty="0">
+              <a:rPr lang="en-US" sz="1200" b="1" dirty="0">
                 <a:solidFill>
                   <a:srgbClr val="B86E1E"/>
                 </a:solidFill>
@@ -6621,7 +6621,7 @@
               <a:t>One row for each statistic, one column for each column of </a:t>
             </a:r>
             <a:r>
-              <a:rPr lang="en-US" sz="1100" i="1" dirty="0">
+              <a:rPr lang="en-US" sz="1100" b="1" i="1" dirty="0">
                 <a:solidFill>
                   <a:srgbClr val="B86E1E"/>
                 </a:solidFill>
@@ -8015,7 +8015,7 @@
               <a:t>how to use </a:t>
             </a:r>
             <a:r>
-              <a:rPr lang="en-US" sz="1800" dirty="0">
+              <a:rPr lang="en-US" sz="1800" b="1" dirty="0">
                 <a:solidFill>
                   <a:srgbClr val="B86E1E"/>
                 </a:solidFill>
@@ -8034,7 +8034,7 @@
               <a:t> and </a:t>
             </a:r>
             <a:r>
-              <a:rPr lang="en-US" sz="1800" dirty="0">
+              <a:rPr lang="en-US" sz="1800" b="1" dirty="0">
                 <a:solidFill>
                   <a:srgbClr val="B86E1E"/>
                 </a:solidFill>
@@ -8238,7 +8238,7 @@
               <a:t>Median </a:t>
             </a:r>
             <a:r>
-              <a:rPr lang="en-US" sz="1500" dirty="0">
+              <a:rPr lang="en-US" sz="1500" b="1" dirty="0">
                 <a:solidFill>
                   <a:srgbClr val="B86E1E"/>
                 </a:solidFill>
@@ -8316,7 +8316,7 @@
               <a:t>Median </a:t>
             </a:r>
             <a:r>
-              <a:rPr lang="en-US" sz="1500" dirty="0">
+              <a:rPr lang="en-US" sz="1500" b="1" dirty="0">
                 <a:solidFill>
                   <a:srgbClr val="B86E1E"/>
                 </a:solidFill>
@@ -8378,7 +8378,7 @@
               <a:t>The </a:t>
             </a:r>
             <a:r>
-              <a:rPr lang="en-US" sz="1500" dirty="0">
+              <a:rPr lang="en-US" sz="1500" b="1" dirty="0">
                 <a:solidFill>
                   <a:srgbClr val="B86E1E"/>
                 </a:solidFill>
@@ -8397,7 +8397,7 @@
               <a:t> min is </a:t>
             </a:r>
             <a:r>
-              <a:rPr lang="en-US" sz="1500" dirty="0">
+              <a:rPr lang="en-US" sz="1500" b="1" dirty="0">
                 <a:solidFill>
                   <a:srgbClr val="B86E1E"/>
                 </a:solidFill>
@@ -8416,7 +8416,7 @@
               <a:t> and max </a:t>
             </a:r>
             <a:r>
-              <a:rPr lang="en-US" sz="1500" dirty="0">
+              <a:rPr lang="en-US" sz="1500" b="1" dirty="0">
                 <a:solidFill>
                   <a:srgbClr val="B86E1E"/>
                 </a:solidFill>
@@ -9299,7 +9299,7 @@
               <a:t> → picks </a:t>
             </a:r>
             <a:r>
-              <a:rPr lang="en-US" sz="1200" dirty="0">
+              <a:rPr lang="en-US" sz="1200" b="1" dirty="0">
                 <a:solidFill>
                   <a:srgbClr val="B86E1E"/>
                 </a:solidFill>
@@ -9489,7 +9489,7 @@
               <a:t>​</a:t>
             </a:r>
             <a:r>
-              <a:rPr lang="en-US" sz="1100" i="1" dirty="0">
+              <a:rPr lang="en-US" sz="1100" b="1" i="1" dirty="0">
                 <a:solidFill>
                   <a:srgbClr val="B86E1E"/>
                 </a:solidFill>
@@ -9524,7 +9524,7 @@
               <a:t> games. Next is </a:t>
             </a:r>
             <a:r>
-              <a:rPr lang="en-US" sz="1100" i="1" dirty="0">
+              <a:rPr lang="en-US" sz="1100" b="1" i="1" dirty="0">
                 <a:solidFill>
                   <a:srgbClr val="B86E1E"/>
                 </a:solidFill>
@@ -9771,7 +9771,7 @@
               <a:t>​</a:t>
             </a:r>
             <a:r>
-              <a:rPr lang="en-US" sz="1800" dirty="0">
+              <a:rPr lang="en-US" sz="1800" b="1" dirty="0">
                 <a:solidFill>
                   <a:srgbClr val="B86E1E"/>
                 </a:solidFill>
@@ -9806,7 +9806,7 @@
               <a:t>. Many methods, like </a:t>
             </a:r>
             <a:r>
-              <a:rPr lang="en-US" sz="1800" dirty="0">
+              <a:rPr lang="en-US" sz="1800" b="1" dirty="0">
                 <a:solidFill>
                   <a:srgbClr val="B86E1E"/>
                 </a:solidFill>
@@ -10196,7 +10196,7 @@
               <a:t> if </a:t>
             </a:r>
             <a:r>
-              <a:rPr lang="en-US" sz="1500" dirty="0">
+              <a:rPr lang="en-US" sz="1500" b="1" dirty="0">
                 <a:solidFill>
                   <a:srgbClr val="B86E1E"/>
                 </a:solidFill>
@@ -10215,7 +10215,7 @@
               <a:t> is missing, use </a:t>
             </a:r>
             <a:r>
-              <a:rPr lang="en-US" sz="1500" dirty="0">
+              <a:rPr lang="en-US" sz="1500" b="1" dirty="0">
                 <a:solidFill>
                   <a:srgbClr val="B86E1E"/>
                 </a:solidFill>
@@ -10234,7 +10234,7 @@
               <a:t> and </a:t>
             </a:r>
             <a:r>
-              <a:rPr lang="en-US" sz="1500" dirty="0">
+              <a:rPr lang="en-US" sz="1500" b="1" dirty="0">
                 <a:solidFill>
                   <a:srgbClr val="B86E1E"/>
                 </a:solidFill>
@@ -11036,7 +11036,7 @@
               <a:t>Use </a:t>
             </a:r>
             <a:r>
-              <a:rPr lang="en-US" sz="1400" dirty="0">
+              <a:rPr lang="en-US" sz="1400" b="1" dirty="0">
                 <a:solidFill>
                   <a:srgbClr val="B86E1E"/>
                 </a:solidFill>
@@ -11055,7 +11055,7 @@
               <a:t>, </a:t>
             </a:r>
             <a:r>
-              <a:rPr lang="en-US" sz="1400" dirty="0">
+              <a:rPr lang="en-US" sz="1400" b="1" dirty="0">
                 <a:solidFill>
                   <a:srgbClr val="B86E1E"/>
                 </a:solidFill>
@@ -11074,7 +11074,7 @@
               <a:t> or </a:t>
             </a:r>
             <a:r>
-              <a:rPr lang="en-US" sz="1400" dirty="0">
+              <a:rPr lang="en-US" sz="1400" b="1" dirty="0">
                 <a:solidFill>
                   <a:srgbClr val="B86E1E"/>
                 </a:solidFill>
